--- a/05_Linkedin_Posts/03_FiPy.pptx
+++ b/05_Linkedin_Posts/03_FiPy.pptx
@@ -6,6 +6,7 @@
   </p:sldMasterIdLst>
   <p:sldIdLst>
     <p:sldId id="258" r:id="rId2"/>
+    <p:sldId id="259" r:id="rId3"/>
   </p:sldIdLst>
   <p:sldSz cx="12192000" cy="6858000"/>
   <p:notesSz cx="6858000" cy="9144000"/>
@@ -261,7 +262,7 @@
           <a:p>
             <a:fld id="{9D4686FF-3DC0-4D03-9102-64E826D8EE6E}" type="datetimeFigureOut">
               <a:rPr lang="LID4096" smtClean="0"/>
-              <a:t>06/24/2026</a:t>
+              <a:t>06/25/2026</a:t>
             </a:fld>
             <a:endParaRPr lang="LID4096"/>
           </a:p>
@@ -461,7 +462,7 @@
           <a:p>
             <a:fld id="{9D4686FF-3DC0-4D03-9102-64E826D8EE6E}" type="datetimeFigureOut">
               <a:rPr lang="LID4096" smtClean="0"/>
-              <a:t>06/24/2026</a:t>
+              <a:t>06/25/2026</a:t>
             </a:fld>
             <a:endParaRPr lang="LID4096"/>
           </a:p>
@@ -671,7 +672,7 @@
           <a:p>
             <a:fld id="{9D4686FF-3DC0-4D03-9102-64E826D8EE6E}" type="datetimeFigureOut">
               <a:rPr lang="LID4096" smtClean="0"/>
-              <a:t>06/24/2026</a:t>
+              <a:t>06/25/2026</a:t>
             </a:fld>
             <a:endParaRPr lang="LID4096"/>
           </a:p>
@@ -871,7 +872,7 @@
           <a:p>
             <a:fld id="{9D4686FF-3DC0-4D03-9102-64E826D8EE6E}" type="datetimeFigureOut">
               <a:rPr lang="LID4096" smtClean="0"/>
-              <a:t>06/24/2026</a:t>
+              <a:t>06/25/2026</a:t>
             </a:fld>
             <a:endParaRPr lang="LID4096"/>
           </a:p>
@@ -1147,7 +1148,7 @@
           <a:p>
             <a:fld id="{9D4686FF-3DC0-4D03-9102-64E826D8EE6E}" type="datetimeFigureOut">
               <a:rPr lang="LID4096" smtClean="0"/>
-              <a:t>06/24/2026</a:t>
+              <a:t>06/25/2026</a:t>
             </a:fld>
             <a:endParaRPr lang="LID4096"/>
           </a:p>
@@ -1415,7 +1416,7 @@
           <a:p>
             <a:fld id="{9D4686FF-3DC0-4D03-9102-64E826D8EE6E}" type="datetimeFigureOut">
               <a:rPr lang="LID4096" smtClean="0"/>
-              <a:t>06/24/2026</a:t>
+              <a:t>06/25/2026</a:t>
             </a:fld>
             <a:endParaRPr lang="LID4096"/>
           </a:p>
@@ -1830,7 +1831,7 @@
           <a:p>
             <a:fld id="{9D4686FF-3DC0-4D03-9102-64E826D8EE6E}" type="datetimeFigureOut">
               <a:rPr lang="LID4096" smtClean="0"/>
-              <a:t>06/24/2026</a:t>
+              <a:t>06/25/2026</a:t>
             </a:fld>
             <a:endParaRPr lang="LID4096"/>
           </a:p>
@@ -1972,7 +1973,7 @@
           <a:p>
             <a:fld id="{9D4686FF-3DC0-4D03-9102-64E826D8EE6E}" type="datetimeFigureOut">
               <a:rPr lang="LID4096" smtClean="0"/>
-              <a:t>06/24/2026</a:t>
+              <a:t>06/25/2026</a:t>
             </a:fld>
             <a:endParaRPr lang="LID4096"/>
           </a:p>
@@ -2085,7 +2086,7 @@
           <a:p>
             <a:fld id="{9D4686FF-3DC0-4D03-9102-64E826D8EE6E}" type="datetimeFigureOut">
               <a:rPr lang="LID4096" smtClean="0"/>
-              <a:t>06/24/2026</a:t>
+              <a:t>06/25/2026</a:t>
             </a:fld>
             <a:endParaRPr lang="LID4096"/>
           </a:p>
@@ -2398,7 +2399,7 @@
           <a:p>
             <a:fld id="{9D4686FF-3DC0-4D03-9102-64E826D8EE6E}" type="datetimeFigureOut">
               <a:rPr lang="LID4096" smtClean="0"/>
-              <a:t>06/24/2026</a:t>
+              <a:t>06/25/2026</a:t>
             </a:fld>
             <a:endParaRPr lang="LID4096"/>
           </a:p>
@@ -2687,7 +2688,7 @@
           <a:p>
             <a:fld id="{9D4686FF-3DC0-4D03-9102-64E826D8EE6E}" type="datetimeFigureOut">
               <a:rPr lang="LID4096" smtClean="0"/>
-              <a:t>06/24/2026</a:t>
+              <a:t>06/25/2026</a:t>
             </a:fld>
             <a:endParaRPr lang="LID4096"/>
           </a:p>
@@ -2930,7 +2931,7 @@
           <a:p>
             <a:fld id="{9D4686FF-3DC0-4D03-9102-64E826D8EE6E}" type="datetimeFigureOut">
               <a:rPr lang="LID4096" smtClean="0"/>
-              <a:t>06/24/2026</a:t>
+              <a:t>06/25/2026</a:t>
             </a:fld>
             <a:endParaRPr lang="LID4096"/>
           </a:p>
@@ -3438,10 +3439,969 @@
           </a:p>
         </p:txBody>
       </p:sp>
+      <p:sp>
+        <p:nvSpPr>
+          <p:cNvPr id="5" name="TextBox 4">
+            <a:extLst>
+              <a:ext uri="{FF2B5EF4-FFF2-40B4-BE49-F238E27FC236}">
+                <a16:creationId xmlns:a16="http://schemas.microsoft.com/office/drawing/2014/main" id="{6049AE3D-1C78-1EA9-2351-1827EAC94377}"/>
+              </a:ext>
+            </a:extLst>
+          </p:cNvPr>
+          <p:cNvSpPr txBox="1"/>
+          <p:nvPr/>
+        </p:nvSpPr>
+        <p:spPr>
+          <a:xfrm>
+            <a:off x="594507" y="6092699"/>
+            <a:ext cx="8377473" cy="461665"/>
+          </a:xfrm>
+          <a:prstGeom prst="rect">
+            <a:avLst/>
+          </a:prstGeom>
+          <a:noFill/>
+        </p:spPr>
+        <p:txBody>
+          <a:bodyPr wrap="square">
+            <a:spAutoFit/>
+          </a:bodyPr>
+          <a:lstStyle/>
+          <a:p>
+            <a:r>
+              <a:rPr lang="LID4096" sz="1200" dirty="0">
+                <a:hlinkClick r:id="rId3"/>
+              </a:rPr>
+              <a:t>https://colab.research.google.com/drive/1x8ZYcXopa_n87rguP4ZIxLN_9jMu6pYK</a:t>
+            </a:r>
+            <a:endParaRPr lang="pt-BR" sz="1200" dirty="0"/>
+          </a:p>
+          <a:p>
+            <a:endParaRPr lang="LID4096" sz="1200" dirty="0"/>
+          </a:p>
+        </p:txBody>
+      </p:sp>
+      <p:grpSp>
+        <p:nvGrpSpPr>
+          <p:cNvPr id="19" name="Group 18">
+            <a:extLst>
+              <a:ext uri="{FF2B5EF4-FFF2-40B4-BE49-F238E27FC236}">
+                <a16:creationId xmlns:a16="http://schemas.microsoft.com/office/drawing/2014/main" id="{0A7D21F0-7BB9-D24C-6EA7-0437C4DBD737}"/>
+              </a:ext>
+            </a:extLst>
+          </p:cNvPr>
+          <p:cNvGrpSpPr/>
+          <p:nvPr/>
+        </p:nvGrpSpPr>
+        <p:grpSpPr>
+          <a:xfrm>
+            <a:off x="594507" y="403225"/>
+            <a:ext cx="6539878" cy="4204990"/>
+            <a:chOff x="266276" y="524136"/>
+            <a:chExt cx="7202612" cy="4531316"/>
+          </a:xfrm>
+        </p:grpSpPr>
+        <p:pic>
+          <p:nvPicPr>
+            <p:cNvPr id="13" name="Picture 12">
+              <a:extLst>
+                <a:ext uri="{FF2B5EF4-FFF2-40B4-BE49-F238E27FC236}">
+                  <a16:creationId xmlns:a16="http://schemas.microsoft.com/office/drawing/2014/main" id="{4A674B11-6394-1E73-28C5-2AE38D09C1C6}"/>
+                </a:ext>
+              </a:extLst>
+            </p:cNvPr>
+            <p:cNvPicPr>
+              <a:picLocks noChangeAspect="1"/>
+            </p:cNvPicPr>
+            <p:nvPr/>
+          </p:nvPicPr>
+          <p:blipFill>
+            <a:blip r:embed="rId4"/>
+            <a:srcRect b="4684"/>
+            <a:stretch>
+              <a:fillRect/>
+            </a:stretch>
+          </p:blipFill>
+          <p:spPr>
+            <a:xfrm>
+              <a:off x="3589169" y="524136"/>
+              <a:ext cx="3879719" cy="4531316"/>
+            </a:xfrm>
+            <a:prstGeom prst="rect">
+              <a:avLst/>
+            </a:prstGeom>
+          </p:spPr>
+        </p:pic>
+        <p:pic>
+          <p:nvPicPr>
+            <p:cNvPr id="15" name="Picture 14">
+              <a:extLst>
+                <a:ext uri="{FF2B5EF4-FFF2-40B4-BE49-F238E27FC236}">
+                  <a16:creationId xmlns:a16="http://schemas.microsoft.com/office/drawing/2014/main" id="{BBCB864B-A1B6-6140-D9FB-6019AE3D599C}"/>
+                </a:ext>
+              </a:extLst>
+            </p:cNvPr>
+            <p:cNvPicPr>
+              <a:picLocks noChangeAspect="1"/>
+            </p:cNvPicPr>
+            <p:nvPr/>
+          </p:nvPicPr>
+          <p:blipFill>
+            <a:blip r:embed="rId5"/>
+            <a:srcRect b="12316"/>
+            <a:stretch>
+              <a:fillRect/>
+            </a:stretch>
+          </p:blipFill>
+          <p:spPr>
+            <a:xfrm>
+              <a:off x="266276" y="524136"/>
+              <a:ext cx="6721203" cy="4531315"/>
+            </a:xfrm>
+            <a:prstGeom prst="rect">
+              <a:avLst/>
+            </a:prstGeom>
+          </p:spPr>
+        </p:pic>
+        <p:pic>
+          <p:nvPicPr>
+            <p:cNvPr id="18" name="Picture 17">
+              <a:extLst>
+                <a:ext uri="{FF2B5EF4-FFF2-40B4-BE49-F238E27FC236}">
+                  <a16:creationId xmlns:a16="http://schemas.microsoft.com/office/drawing/2014/main" id="{5CFA818F-EC0B-EDE4-02C6-513635FD6133}"/>
+                </a:ext>
+              </a:extLst>
+            </p:cNvPr>
+            <p:cNvPicPr>
+              <a:picLocks noChangeAspect="1"/>
+            </p:cNvPicPr>
+            <p:nvPr/>
+          </p:nvPicPr>
+          <p:blipFill>
+            <a:blip r:embed="rId5"/>
+            <a:srcRect l="89677" b="89265"/>
+            <a:stretch>
+              <a:fillRect/>
+            </a:stretch>
+          </p:blipFill>
+          <p:spPr>
+            <a:xfrm>
+              <a:off x="6775076" y="611375"/>
+              <a:ext cx="693812" cy="554736"/>
+            </a:xfrm>
+            <a:prstGeom prst="rect">
+              <a:avLst/>
+            </a:prstGeom>
+          </p:spPr>
+        </p:pic>
+      </p:grpSp>
     </p:spTree>
     <p:extLst>
       <p:ext uri="{BB962C8B-B14F-4D97-AF65-F5344CB8AC3E}">
         <p14:creationId xmlns:p14="http://schemas.microsoft.com/office/powerpoint/2010/main" val="430310755"/>
+      </p:ext>
+    </p:extLst>
+  </p:cSld>
+  <p:clrMapOvr>
+    <a:masterClrMapping/>
+  </p:clrMapOvr>
+</p:sld>
+</file>
+
+<file path=ppt/slides/slide2.xml><?xml version="1.0" encoding="utf-8"?>
+<p:sld xmlns:a="http://schemas.openxmlformats.org/drawingml/2006/main" xmlns:r="http://schemas.openxmlformats.org/officeDocument/2006/relationships" xmlns:p="http://schemas.openxmlformats.org/presentationml/2006/main">
+  <p:cSld>
+    <p:spTree>
+      <p:nvGrpSpPr>
+        <p:cNvPr id="1" name=""/>
+        <p:cNvGrpSpPr/>
+        <p:nvPr/>
+      </p:nvGrpSpPr>
+      <p:grpSpPr>
+        <a:xfrm>
+          <a:off x="0" y="0"/>
+          <a:ext cx="0" cy="0"/>
+          <a:chOff x="0" y="0"/>
+          <a:chExt cx="0" cy="0"/>
+        </a:xfrm>
+      </p:grpSpPr>
+      <p:grpSp>
+        <p:nvGrpSpPr>
+          <p:cNvPr id="32" name="Group 31">
+            <a:extLst>
+              <a:ext uri="{FF2B5EF4-FFF2-40B4-BE49-F238E27FC236}">
+                <a16:creationId xmlns:a16="http://schemas.microsoft.com/office/drawing/2014/main" id="{F3303ACA-F08C-ECB7-0742-CB78B6272D25}"/>
+              </a:ext>
+            </a:extLst>
+          </p:cNvPr>
+          <p:cNvGrpSpPr>
+            <a:grpSpLocks noChangeAspect="1"/>
+          </p:cNvGrpSpPr>
+          <p:nvPr/>
+        </p:nvGrpSpPr>
+        <p:grpSpPr>
+          <a:xfrm>
+            <a:off x="3829294" y="1753234"/>
+            <a:ext cx="6056916" cy="2844236"/>
+            <a:chOff x="3648175" y="2356703"/>
+            <a:chExt cx="6941736" cy="3479148"/>
+          </a:xfrm>
+        </p:grpSpPr>
+        <p:sp>
+          <p:nvSpPr>
+            <p:cNvPr id="27" name="Rectangle 26">
+              <a:extLst>
+                <a:ext uri="{FF2B5EF4-FFF2-40B4-BE49-F238E27FC236}">
+                  <a16:creationId xmlns:a16="http://schemas.microsoft.com/office/drawing/2014/main" id="{996F7053-F816-2D68-D47C-89B98F4F6D0B}"/>
+                </a:ext>
+              </a:extLst>
+            </p:cNvPr>
+            <p:cNvSpPr/>
+            <p:nvPr/>
+          </p:nvSpPr>
+          <p:spPr>
+            <a:xfrm>
+              <a:off x="3648175" y="2356703"/>
+              <a:ext cx="6941736" cy="3314350"/>
+            </a:xfrm>
+            <a:prstGeom prst="rect">
+              <a:avLst/>
+            </a:prstGeom>
+            <a:solidFill>
+              <a:schemeClr val="bg1"/>
+            </a:solidFill>
+            <a:ln>
+              <a:noFill/>
+            </a:ln>
+          </p:spPr>
+          <p:style>
+            <a:lnRef idx="2">
+              <a:schemeClr val="accent1">
+                <a:shade val="15000"/>
+              </a:schemeClr>
+            </a:lnRef>
+            <a:fillRef idx="1">
+              <a:schemeClr val="accent1"/>
+            </a:fillRef>
+            <a:effectRef idx="0">
+              <a:schemeClr val="accent1"/>
+            </a:effectRef>
+            <a:fontRef idx="minor">
+              <a:schemeClr val="lt1"/>
+            </a:fontRef>
+          </p:style>
+          <p:txBody>
+            <a:bodyPr rtlCol="0" anchor="ctr"/>
+            <a:lstStyle/>
+            <a:p>
+              <a:pPr algn="ctr"/>
+              <a:endParaRPr lang="LID4096" sz="1600"/>
+            </a:p>
+          </p:txBody>
+        </p:sp>
+        <p:sp>
+          <p:nvSpPr>
+            <p:cNvPr id="20" name="TextBox 19">
+              <a:extLst>
+                <a:ext uri="{FF2B5EF4-FFF2-40B4-BE49-F238E27FC236}">
+                  <a16:creationId xmlns:a16="http://schemas.microsoft.com/office/drawing/2014/main" id="{021272E2-F470-5EAF-4D19-9B5F6D36AE77}"/>
+                </a:ext>
+              </a:extLst>
+            </p:cNvPr>
+            <p:cNvSpPr txBox="1"/>
+            <p:nvPr/>
+          </p:nvSpPr>
+          <p:spPr>
+            <a:xfrm>
+              <a:off x="4227964" y="2479749"/>
+              <a:ext cx="6176473" cy="3275383"/>
+            </a:xfrm>
+            <a:prstGeom prst="rect">
+              <a:avLst/>
+            </a:prstGeom>
+            <a:noFill/>
+          </p:spPr>
+          <p:txBody>
+            <a:bodyPr wrap="square" rIns="0">
+              <a:spAutoFit/>
+            </a:bodyPr>
+            <a:lstStyle/>
+            <a:p>
+              <a:pPr>
+                <a:buNone/>
+              </a:pPr>
+              <a:r>
+                <a:rPr lang="en-US" sz="1600" b="1" spc="-200" dirty="0">
+                  <a:solidFill>
+                    <a:srgbClr val="000000"/>
+                  </a:solidFill>
+                  <a:effectLst/>
+                  <a:latin typeface="Courier New" panose="02070309020205020404" pitchFamily="49" charset="0"/>
+                </a:rPr>
+                <a:t>C = (</a:t>
+              </a:r>
+              <a:r>
+                <a:rPr lang="en-US" sz="1600" b="1" spc="-200" dirty="0">
+                  <a:solidFill>
+                    <a:srgbClr val="00B050"/>
+                  </a:solidFill>
+                  <a:effectLst>
+                    <a:outerShdw blurRad="38100" dist="38100" dir="2700000" algn="tl">
+                      <a:srgbClr val="000000">
+                        <a:alpha val="43137"/>
+                      </a:srgbClr>
+                    </a:outerShdw>
+                  </a:effectLst>
+                  <a:latin typeface="Courier New" panose="02070309020205020404" pitchFamily="49" charset="0"/>
+                </a:rPr>
+                <a:t>float</a:t>
+              </a:r>
+              <a:r>
+                <a:rPr lang="en-US" sz="1600" b="1" spc="-200" dirty="0">
+                  <a:solidFill>
+                    <a:srgbClr val="000000"/>
+                  </a:solidFill>
+                  <a:effectLst>
+                    <a:outerShdw blurRad="38100" dist="38100" dir="2700000" algn="tl">
+                      <a:srgbClr val="000000">
+                        <a:alpha val="43137"/>
+                      </a:srgbClr>
+                    </a:outerShdw>
+                  </a:effectLst>
+                  <a:latin typeface="Courier New" panose="02070309020205020404" pitchFamily="49" charset="0"/>
+                </a:rPr>
+                <a:t> </a:t>
+              </a:r>
+              <a:r>
+                <a:rPr lang="en-US" sz="1600" b="1" spc="-200" dirty="0">
+                  <a:solidFill>
+                    <a:srgbClr val="000000"/>
+                  </a:solidFill>
+                  <a:effectLst/>
+                  <a:latin typeface="Courier New" panose="02070309020205020404" pitchFamily="49" charset="0"/>
+                </a:rPr>
+                <a:t>*) malloc(sizeof(</a:t>
+              </a:r>
+              <a:r>
+                <a:rPr lang="en-US" sz="1600" b="1" spc="-200" dirty="0">
+                  <a:solidFill>
+                    <a:srgbClr val="00B050"/>
+                  </a:solidFill>
+                  <a:effectLst>
+                    <a:outerShdw blurRad="38100" dist="38100" dir="2700000" algn="tl">
+                      <a:srgbClr val="000000">
+                        <a:alpha val="43137"/>
+                      </a:srgbClr>
+                    </a:outerShdw>
+                  </a:effectLst>
+                  <a:latin typeface="Courier New" panose="02070309020205020404" pitchFamily="49" charset="0"/>
+                </a:rPr>
+                <a:t>float</a:t>
+              </a:r>
+              <a:r>
+                <a:rPr lang="en-US" sz="1600" b="1" spc="-200" dirty="0">
+                  <a:solidFill>
+                    <a:srgbClr val="000000"/>
+                  </a:solidFill>
+                  <a:effectLst/>
+                  <a:latin typeface="Courier New" panose="02070309020205020404" pitchFamily="49" charset="0"/>
+                </a:rPr>
+                <a:t>) * B_COLs * A_ROWs);</a:t>
+              </a:r>
+            </a:p>
+            <a:p>
+              <a:pPr>
+                <a:buNone/>
+              </a:pPr>
+              <a:endParaRPr lang="en-US" sz="800" b="1" spc="-200" dirty="0">
+                <a:solidFill>
+                  <a:srgbClr val="000000"/>
+                </a:solidFill>
+                <a:effectLst/>
+                <a:latin typeface="Courier New" panose="02070309020205020404" pitchFamily="49" charset="0"/>
+              </a:endParaRPr>
+            </a:p>
+            <a:p>
+              <a:pPr>
+                <a:buNone/>
+              </a:pPr>
+              <a:r>
+                <a:rPr lang="en-US" sz="1600" b="1" spc="-200" dirty="0">
+                  <a:solidFill>
+                    <a:srgbClr val="9723B4"/>
+                  </a:solidFill>
+                  <a:effectLst>
+                    <a:outerShdw blurRad="38100" dist="38100" dir="2700000" algn="tl">
+                      <a:srgbClr val="000000">
+                        <a:alpha val="43137"/>
+                      </a:srgbClr>
+                    </a:outerShdw>
+                  </a:effectLst>
+                  <a:latin typeface="Courier New" panose="02070309020205020404" pitchFamily="49" charset="0"/>
+                </a:rPr>
+                <a:t>for</a:t>
+              </a:r>
+              <a:r>
+                <a:rPr lang="en-US" sz="1600" b="1" spc="-200" dirty="0">
+                  <a:solidFill>
+                    <a:srgbClr val="000000"/>
+                  </a:solidFill>
+                  <a:effectLst>
+                    <a:outerShdw blurRad="38100" dist="38100" dir="2700000" algn="tl">
+                      <a:srgbClr val="000000">
+                        <a:alpha val="43137"/>
+                      </a:srgbClr>
+                    </a:outerShdw>
+                  </a:effectLst>
+                  <a:latin typeface="Courier New" panose="02070309020205020404" pitchFamily="49" charset="0"/>
+                </a:rPr>
+                <a:t> </a:t>
+              </a:r>
+              <a:r>
+                <a:rPr lang="en-US" sz="1600" b="1" spc="-200" dirty="0">
+                  <a:solidFill>
+                    <a:srgbClr val="000000"/>
+                  </a:solidFill>
+                  <a:effectLst/>
+                  <a:latin typeface="Courier New" panose="02070309020205020404" pitchFamily="49" charset="0"/>
+                </a:rPr>
+                <a:t>(i = </a:t>
+              </a:r>
+              <a:r>
+                <a:rPr lang="en-US" sz="1600" b="1" spc="-200" dirty="0">
+                  <a:solidFill>
+                    <a:srgbClr val="116644"/>
+                  </a:solidFill>
+                  <a:effectLst/>
+                  <a:latin typeface="Courier New" panose="02070309020205020404" pitchFamily="49" charset="0"/>
+                </a:rPr>
+                <a:t>0</a:t>
+              </a:r>
+              <a:r>
+                <a:rPr lang="en-US" sz="1600" b="1" spc="-200" dirty="0">
+                  <a:solidFill>
+                    <a:srgbClr val="000000"/>
+                  </a:solidFill>
+                  <a:effectLst/>
+                  <a:latin typeface="Courier New" panose="02070309020205020404" pitchFamily="49" charset="0"/>
+                </a:rPr>
+                <a:t>; i &lt; B_COLs; i++) {</a:t>
+              </a:r>
+            </a:p>
+            <a:p>
+              <a:pPr>
+                <a:buNone/>
+              </a:pPr>
+              <a:r>
+                <a:rPr lang="en-US" sz="1600" b="1" spc="-200" dirty="0">
+                  <a:solidFill>
+                    <a:srgbClr val="000000"/>
+                  </a:solidFill>
+                  <a:effectLst/>
+                  <a:latin typeface="Courier New" panose="02070309020205020404" pitchFamily="49" charset="0"/>
+                </a:rPr>
+                <a:t>    </a:t>
+              </a:r>
+              <a:r>
+                <a:rPr lang="en-US" sz="1600" b="1" spc="-200" dirty="0">
+                  <a:solidFill>
+                    <a:srgbClr val="9723B4"/>
+                  </a:solidFill>
+                  <a:effectLst>
+                    <a:outerShdw blurRad="38100" dist="38100" dir="2700000" algn="tl">
+                      <a:srgbClr val="000000">
+                        <a:alpha val="43137"/>
+                      </a:srgbClr>
+                    </a:outerShdw>
+                  </a:effectLst>
+                  <a:latin typeface="Courier New" panose="02070309020205020404" pitchFamily="49" charset="0"/>
+                </a:rPr>
+                <a:t>for</a:t>
+              </a:r>
+              <a:r>
+                <a:rPr lang="en-US" sz="1600" b="1" spc="-200" dirty="0">
+                  <a:solidFill>
+                    <a:srgbClr val="000000"/>
+                  </a:solidFill>
+                  <a:effectLst>
+                    <a:outerShdw blurRad="38100" dist="38100" dir="2700000" algn="tl">
+                      <a:srgbClr val="000000">
+                        <a:alpha val="43137"/>
+                      </a:srgbClr>
+                    </a:outerShdw>
+                  </a:effectLst>
+                  <a:latin typeface="Courier New" panose="02070309020205020404" pitchFamily="49" charset="0"/>
+                </a:rPr>
+                <a:t> </a:t>
+              </a:r>
+              <a:r>
+                <a:rPr lang="en-US" sz="1600" b="1" spc="-200" dirty="0">
+                  <a:solidFill>
+                    <a:srgbClr val="000000"/>
+                  </a:solidFill>
+                  <a:effectLst/>
+                  <a:latin typeface="Courier New" panose="02070309020205020404" pitchFamily="49" charset="0"/>
+                </a:rPr>
+                <a:t>(j = </a:t>
+              </a:r>
+              <a:r>
+                <a:rPr lang="en-US" sz="1600" b="1" spc="-200" dirty="0">
+                  <a:solidFill>
+                    <a:srgbClr val="116644"/>
+                  </a:solidFill>
+                  <a:effectLst/>
+                  <a:latin typeface="Courier New" panose="02070309020205020404" pitchFamily="49" charset="0"/>
+                </a:rPr>
+                <a:t>0</a:t>
+              </a:r>
+              <a:r>
+                <a:rPr lang="en-US" sz="1600" b="1" spc="-200" dirty="0">
+                  <a:solidFill>
+                    <a:srgbClr val="000000"/>
+                  </a:solidFill>
+                  <a:effectLst/>
+                  <a:latin typeface="Courier New" panose="02070309020205020404" pitchFamily="49" charset="0"/>
+                </a:rPr>
+                <a:t>; j &lt; A_ROWs; </a:t>
+              </a:r>
+              <a:r>
+                <a:rPr lang="en-US" sz="1600" b="1" spc="-200" dirty="0" err="1">
+                  <a:solidFill>
+                    <a:srgbClr val="000000"/>
+                  </a:solidFill>
+                  <a:effectLst/>
+                  <a:latin typeface="Courier New" panose="02070309020205020404" pitchFamily="49" charset="0"/>
+                </a:rPr>
+                <a:t>j++</a:t>
+              </a:r>
+              <a:r>
+                <a:rPr lang="en-US" sz="1600" b="1" spc="-200" dirty="0">
+                  <a:solidFill>
+                    <a:srgbClr val="000000"/>
+                  </a:solidFill>
+                  <a:effectLst/>
+                  <a:latin typeface="Courier New" panose="02070309020205020404" pitchFamily="49" charset="0"/>
+                </a:rPr>
+                <a:t>) {</a:t>
+              </a:r>
+            </a:p>
+            <a:p>
+              <a:pPr>
+                <a:buNone/>
+              </a:pPr>
+              <a:r>
+                <a:rPr lang="en-US" sz="1600" b="1" spc="-200" dirty="0">
+                  <a:solidFill>
+                    <a:srgbClr val="000000"/>
+                  </a:solidFill>
+                  <a:effectLst/>
+                  <a:latin typeface="Courier New" panose="02070309020205020404" pitchFamily="49" charset="0"/>
+                </a:rPr>
+                <a:t>        C[i][j] = </a:t>
+              </a:r>
+              <a:r>
+                <a:rPr lang="en-US" sz="1600" b="1" spc="-200" dirty="0">
+                  <a:solidFill>
+                    <a:srgbClr val="116644"/>
+                  </a:solidFill>
+                  <a:effectLst/>
+                  <a:latin typeface="Courier New" panose="02070309020205020404" pitchFamily="49" charset="0"/>
+                </a:rPr>
+                <a:t>0</a:t>
+              </a:r>
+              <a:r>
+                <a:rPr lang="en-US" sz="1600" b="1" spc="-200" dirty="0">
+                  <a:solidFill>
+                    <a:srgbClr val="000000"/>
+                  </a:solidFill>
+                  <a:effectLst/>
+                  <a:latin typeface="Courier New" panose="02070309020205020404" pitchFamily="49" charset="0"/>
+                </a:rPr>
+                <a:t>;</a:t>
+              </a:r>
+            </a:p>
+            <a:p>
+              <a:pPr>
+                <a:buNone/>
+              </a:pPr>
+              <a:r>
+                <a:rPr lang="en-US" sz="1600" b="1" spc="-200" dirty="0">
+                  <a:solidFill>
+                    <a:srgbClr val="000000"/>
+                  </a:solidFill>
+                  <a:effectLst/>
+                  <a:latin typeface="Courier New" panose="02070309020205020404" pitchFamily="49" charset="0"/>
+                </a:rPr>
+                <a:t>        </a:t>
+              </a:r>
+              <a:r>
+                <a:rPr lang="en-US" sz="1600" b="1" spc="-200" dirty="0">
+                  <a:solidFill>
+                    <a:srgbClr val="9723B4"/>
+                  </a:solidFill>
+                  <a:effectLst>
+                    <a:outerShdw blurRad="38100" dist="38100" dir="2700000" algn="tl">
+                      <a:srgbClr val="000000">
+                        <a:alpha val="43137"/>
+                      </a:srgbClr>
+                    </a:outerShdw>
+                  </a:effectLst>
+                  <a:latin typeface="Courier New" panose="02070309020205020404" pitchFamily="49" charset="0"/>
+                </a:rPr>
+                <a:t>for</a:t>
+              </a:r>
+              <a:r>
+                <a:rPr lang="en-US" sz="1600" b="1" spc="-200" dirty="0">
+                  <a:solidFill>
+                    <a:srgbClr val="000000"/>
+                  </a:solidFill>
+                  <a:effectLst>
+                    <a:outerShdw blurRad="38100" dist="38100" dir="2700000" algn="tl">
+                      <a:srgbClr val="000000">
+                        <a:alpha val="43137"/>
+                      </a:srgbClr>
+                    </a:outerShdw>
+                  </a:effectLst>
+                  <a:latin typeface="Courier New" panose="02070309020205020404" pitchFamily="49" charset="0"/>
+                </a:rPr>
+                <a:t> </a:t>
+              </a:r>
+              <a:r>
+                <a:rPr lang="en-US" sz="1600" b="1" spc="-200" dirty="0">
+                  <a:solidFill>
+                    <a:srgbClr val="000000"/>
+                  </a:solidFill>
+                  <a:effectLst/>
+                  <a:latin typeface="Courier New" panose="02070309020205020404" pitchFamily="49" charset="0"/>
+                </a:rPr>
+                <a:t>(k = </a:t>
+              </a:r>
+              <a:r>
+                <a:rPr lang="en-US" sz="1600" b="1" spc="-200" dirty="0">
+                  <a:solidFill>
+                    <a:srgbClr val="116644"/>
+                  </a:solidFill>
+                  <a:effectLst/>
+                  <a:latin typeface="Courier New" panose="02070309020205020404" pitchFamily="49" charset="0"/>
+                </a:rPr>
+                <a:t>0</a:t>
+              </a:r>
+              <a:r>
+                <a:rPr lang="en-US" sz="1600" b="1" spc="-200" dirty="0">
+                  <a:solidFill>
+                    <a:srgbClr val="000000"/>
+                  </a:solidFill>
+                  <a:effectLst/>
+                  <a:latin typeface="Courier New" panose="02070309020205020404" pitchFamily="49" charset="0"/>
+                </a:rPr>
+                <a:t>; k &lt; A_COLs; k++) {</a:t>
+              </a:r>
+            </a:p>
+            <a:p>
+              <a:pPr>
+                <a:buNone/>
+              </a:pPr>
+              <a:r>
+                <a:rPr lang="en-US" sz="1600" b="1" spc="-200" dirty="0">
+                  <a:solidFill>
+                    <a:srgbClr val="000000"/>
+                  </a:solidFill>
+                  <a:effectLst/>
+                  <a:latin typeface="Courier New" panose="02070309020205020404" pitchFamily="49" charset="0"/>
+                </a:rPr>
+                <a:t>            </a:t>
+              </a:r>
+              <a:r>
+                <a:rPr lang="en-US" sz="1600" b="1" spc="-200" dirty="0">
+                  <a:solidFill>
+                    <a:srgbClr val="FF0000"/>
+                  </a:solidFill>
+                  <a:effectLst/>
+                  <a:latin typeface="Courier New" panose="02070309020205020404" pitchFamily="49" charset="0"/>
+                </a:rPr>
+                <a:t>C[i][j] += A[i][k] * B[k][j];</a:t>
+              </a:r>
+            </a:p>
+            <a:p>
+              <a:pPr>
+                <a:buNone/>
+              </a:pPr>
+              <a:r>
+                <a:rPr lang="en-US" sz="1600" b="1" spc="-200" dirty="0">
+                  <a:solidFill>
+                    <a:srgbClr val="000000"/>
+                  </a:solidFill>
+                  <a:effectLst/>
+                  <a:latin typeface="Courier New" panose="02070309020205020404" pitchFamily="49" charset="0"/>
+                </a:rPr>
+                <a:t>        }</a:t>
+              </a:r>
+            </a:p>
+            <a:p>
+              <a:pPr>
+                <a:buNone/>
+              </a:pPr>
+              <a:r>
+                <a:rPr lang="en-US" sz="1600" b="1" spc="-200" dirty="0">
+                  <a:solidFill>
+                    <a:srgbClr val="000000"/>
+                  </a:solidFill>
+                  <a:effectLst/>
+                  <a:latin typeface="Courier New" panose="02070309020205020404" pitchFamily="49" charset="0"/>
+                </a:rPr>
+                <a:t>    }</a:t>
+              </a:r>
+            </a:p>
+            <a:p>
+              <a:pPr>
+                <a:buNone/>
+              </a:pPr>
+              <a:r>
+                <a:rPr lang="en-US" sz="1600" b="1" spc="-200" dirty="0">
+                  <a:solidFill>
+                    <a:srgbClr val="000000"/>
+                  </a:solidFill>
+                  <a:effectLst/>
+                  <a:latin typeface="Courier New" panose="02070309020205020404" pitchFamily="49" charset="0"/>
+                </a:rPr>
+                <a:t>}</a:t>
+              </a:r>
+            </a:p>
+            <a:p>
+              <a:pPr>
+                <a:buNone/>
+              </a:pPr>
+              <a:r>
+                <a:rPr lang="en-US" sz="1600" b="1" spc="-200" dirty="0">
+                  <a:solidFill>
+                    <a:srgbClr val="0000FF"/>
+                  </a:solidFill>
+                  <a:effectLst>
+                    <a:outerShdw blurRad="38100" dist="38100" dir="2700000" algn="tl">
+                      <a:srgbClr val="000000">
+                        <a:alpha val="43137"/>
+                      </a:srgbClr>
+                    </a:outerShdw>
+                  </a:effectLst>
+                  <a:latin typeface="Courier New" panose="02070309020205020404" pitchFamily="49" charset="0"/>
+                </a:rPr>
+                <a:t>(versus)...</a:t>
+              </a:r>
+              <a:r>
+                <a:rPr lang="en-US" sz="1600" b="1" spc="-200" dirty="0">
+                  <a:solidFill>
+                    <a:srgbClr val="000000"/>
+                  </a:solidFill>
+                  <a:effectLst/>
+                  <a:latin typeface="Courier New" panose="02070309020205020404" pitchFamily="49" charset="0"/>
+                </a:rPr>
+                <a:t> </a:t>
+              </a:r>
+              <a:r>
+                <a:rPr lang="en-US" sz="1600" b="1" spc="-200" dirty="0">
+                  <a:solidFill>
+                    <a:srgbClr val="FF0000"/>
+                  </a:solidFill>
+                  <a:effectLst/>
+                  <a:latin typeface="Courier New" panose="02070309020205020404" pitchFamily="49" charset="0"/>
+                </a:rPr>
+                <a:t>C = A * B</a:t>
+              </a:r>
+            </a:p>
+          </p:txBody>
+        </p:sp>
+        <p:sp>
+          <p:nvSpPr>
+            <p:cNvPr id="26" name="Rectangle: Rounded Corners 25">
+              <a:extLst>
+                <a:ext uri="{FF2B5EF4-FFF2-40B4-BE49-F238E27FC236}">
+                  <a16:creationId xmlns:a16="http://schemas.microsoft.com/office/drawing/2014/main" id="{DDC93CFF-3ED5-53A9-3DCD-932064B3F265}"/>
+                </a:ext>
+              </a:extLst>
+            </p:cNvPr>
+            <p:cNvSpPr/>
+            <p:nvPr/>
+          </p:nvSpPr>
+          <p:spPr>
+            <a:xfrm>
+              <a:off x="3695307" y="2394408"/>
+              <a:ext cx="6840110" cy="3441443"/>
+            </a:xfrm>
+            <a:prstGeom prst="roundRect">
+              <a:avLst>
+                <a:gd name="adj" fmla="val 8812"/>
+              </a:avLst>
+            </a:prstGeom>
+            <a:noFill/>
+            <a:ln w="28575">
+              <a:solidFill>
+                <a:schemeClr val="accent5">
+                  <a:lumMod val="60000"/>
+                  <a:lumOff val="40000"/>
+                </a:schemeClr>
+              </a:solidFill>
+            </a:ln>
+          </p:spPr>
+          <p:style>
+            <a:lnRef idx="2">
+              <a:schemeClr val="accent1">
+                <a:shade val="15000"/>
+              </a:schemeClr>
+            </a:lnRef>
+            <a:fillRef idx="1">
+              <a:schemeClr val="accent1"/>
+            </a:fillRef>
+            <a:effectRef idx="0">
+              <a:schemeClr val="accent1"/>
+            </a:effectRef>
+            <a:fontRef idx="minor">
+              <a:schemeClr val="lt1"/>
+            </a:fontRef>
+          </p:style>
+          <p:txBody>
+            <a:bodyPr rtlCol="0" anchor="ctr"/>
+            <a:lstStyle/>
+            <a:p>
+              <a:pPr algn="ctr"/>
+              <a:endParaRPr lang="LID4096" sz="1600"/>
+            </a:p>
+          </p:txBody>
+        </p:sp>
+        <p:grpSp>
+          <p:nvGrpSpPr>
+            <p:cNvPr id="30" name="Group 29">
+              <a:extLst>
+                <a:ext uri="{FF2B5EF4-FFF2-40B4-BE49-F238E27FC236}">
+                  <a16:creationId xmlns:a16="http://schemas.microsoft.com/office/drawing/2014/main" id="{DB721344-DDB1-4BF9-90F8-7EF08EF4CA2F}"/>
+                </a:ext>
+              </a:extLst>
+            </p:cNvPr>
+            <p:cNvGrpSpPr>
+              <a:grpSpLocks noChangeAspect="1"/>
+            </p:cNvGrpSpPr>
+            <p:nvPr/>
+          </p:nvGrpSpPr>
+          <p:grpSpPr>
+            <a:xfrm>
+              <a:off x="3797289" y="2481183"/>
+              <a:ext cx="405148" cy="405148"/>
+              <a:chOff x="8767131" y="1159496"/>
+              <a:chExt cx="621965" cy="621965"/>
+            </a:xfrm>
+          </p:grpSpPr>
+          <p:sp>
+            <p:nvSpPr>
+              <p:cNvPr id="28" name="Oval 27">
+                <a:extLst>
+                  <a:ext uri="{FF2B5EF4-FFF2-40B4-BE49-F238E27FC236}">
+                    <a16:creationId xmlns:a16="http://schemas.microsoft.com/office/drawing/2014/main" id="{48633FEB-E89B-BE36-8DE8-974D6BF9579D}"/>
+                  </a:ext>
+                </a:extLst>
+              </p:cNvPr>
+              <p:cNvSpPr>
+                <a:spLocks noChangeAspect="1"/>
+              </p:cNvSpPr>
+              <p:nvPr/>
+            </p:nvSpPr>
+            <p:spPr>
+              <a:xfrm>
+                <a:off x="8767131" y="1159496"/>
+                <a:ext cx="621965" cy="621965"/>
+              </a:xfrm>
+              <a:prstGeom prst="ellipse">
+                <a:avLst/>
+              </a:prstGeom>
+              <a:solidFill>
+                <a:schemeClr val="tx1"/>
+              </a:solidFill>
+              <a:ln>
+                <a:noFill/>
+              </a:ln>
+            </p:spPr>
+            <p:style>
+              <a:lnRef idx="2">
+                <a:schemeClr val="accent1">
+                  <a:shade val="15000"/>
+                </a:schemeClr>
+              </a:lnRef>
+              <a:fillRef idx="1">
+                <a:schemeClr val="accent1"/>
+              </a:fillRef>
+              <a:effectRef idx="0">
+                <a:schemeClr val="accent1"/>
+              </a:effectRef>
+              <a:fontRef idx="minor">
+                <a:schemeClr val="lt1"/>
+              </a:fontRef>
+            </p:style>
+            <p:txBody>
+              <a:bodyPr rtlCol="0" anchor="ctr"/>
+              <a:lstStyle/>
+              <a:p>
+                <a:pPr algn="ctr"/>
+                <a:endParaRPr lang="LID4096" sz="1600"/>
+              </a:p>
+            </p:txBody>
+          </p:sp>
+          <p:sp>
+            <p:nvSpPr>
+              <p:cNvPr id="29" name="Isosceles Triangle 28">
+                <a:extLst>
+                  <a:ext uri="{FF2B5EF4-FFF2-40B4-BE49-F238E27FC236}">
+                    <a16:creationId xmlns:a16="http://schemas.microsoft.com/office/drawing/2014/main" id="{9855CF4A-C116-8FF3-AB4B-E9FD05005BD0}"/>
+                  </a:ext>
+                </a:extLst>
+              </p:cNvPr>
+              <p:cNvSpPr>
+                <a:spLocks noChangeAspect="1"/>
+              </p:cNvSpPr>
+              <p:nvPr/>
+            </p:nvSpPr>
+            <p:spPr>
+              <a:xfrm rot="5400000">
+                <a:off x="8950974" y="1293511"/>
+                <a:ext cx="365760" cy="365760"/>
+              </a:xfrm>
+              <a:prstGeom prst="triangle">
+                <a:avLst/>
+              </a:prstGeom>
+              <a:solidFill>
+                <a:schemeClr val="bg1"/>
+              </a:solidFill>
+              <a:ln>
+                <a:noFill/>
+              </a:ln>
+            </p:spPr>
+            <p:style>
+              <a:lnRef idx="2">
+                <a:schemeClr val="accent1">
+                  <a:shade val="15000"/>
+                </a:schemeClr>
+              </a:lnRef>
+              <a:fillRef idx="1">
+                <a:schemeClr val="accent1"/>
+              </a:fillRef>
+              <a:effectRef idx="0">
+                <a:schemeClr val="accent1"/>
+              </a:effectRef>
+              <a:fontRef idx="minor">
+                <a:schemeClr val="lt1"/>
+              </a:fontRef>
+            </p:style>
+            <p:txBody>
+              <a:bodyPr rtlCol="0" anchor="ctr"/>
+              <a:lstStyle/>
+              <a:p>
+                <a:pPr algn="ctr"/>
+                <a:endParaRPr lang="LID4096" sz="1600"/>
+              </a:p>
+            </p:txBody>
+          </p:sp>
+        </p:grpSp>
+      </p:grpSp>
+    </p:spTree>
+    <p:extLst>
+      <p:ext uri="{BB962C8B-B14F-4D97-AF65-F5344CB8AC3E}">
+        <p14:creationId xmlns:p14="http://schemas.microsoft.com/office/powerpoint/2010/main" val="3967591869"/>
       </p:ext>
     </p:extLst>
   </p:cSld>
